--- a/AssettoAuto.pptx
+++ b/AssettoAuto.pptx
@@ -4,6 +4,9 @@
   <p:sldMasterIdLst>
     <p:sldMasterId id="2147483660" r:id="rId1"/>
   </p:sldMasterIdLst>
+  <p:notesMasterIdLst>
+    <p:notesMasterId r:id="rId12"/>
+  </p:notesMasterIdLst>
   <p:sldIdLst>
     <p:sldId id="256" r:id="rId2"/>
     <p:sldId id="260" r:id="rId3"/>
@@ -113,7 +116,529 @@
       </a:defRPr>
     </a:lvl9pPr>
   </p:defaultTextStyle>
+  <p:extLst>
+    <p:ext uri="{EFAFB233-063F-42B5-8137-9DF3F51BA10A}">
+      <p15:sldGuideLst xmlns:p15="http://schemas.microsoft.com/office/powerpoint/2012/main"/>
+    </p:ext>
+  </p:extLst>
 </p:presentation>
+</file>
+
+<file path=ppt/notesMasters/notesMaster1.xml><?xml version="1.0" encoding="utf-8"?>
+<p:notesMaster xmlns:a="http://schemas.openxmlformats.org/drawingml/2006/main" xmlns:r="http://schemas.openxmlformats.org/officeDocument/2006/relationships" xmlns:p="http://schemas.openxmlformats.org/presentationml/2006/main">
+  <p:cSld>
+    <p:bg>
+      <p:bgRef idx="1001">
+        <a:schemeClr val="bg1"/>
+      </p:bgRef>
+    </p:bg>
+    <p:spTree>
+      <p:nvGrpSpPr>
+        <p:cNvPr id="1" name=""/>
+        <p:cNvGrpSpPr/>
+        <p:nvPr/>
+      </p:nvGrpSpPr>
+      <p:grpSpPr>
+        <a:xfrm>
+          <a:off x="0" y="0"/>
+          <a:ext cx="0" cy="0"/>
+          <a:chOff x="0" y="0"/>
+          <a:chExt cx="0" cy="0"/>
+        </a:xfrm>
+      </p:grpSpPr>
+      <p:sp>
+        <p:nvSpPr>
+          <p:cNvPr id="2" name="Élőfej helye 1"/>
+          <p:cNvSpPr>
+            <a:spLocks noGrp="1"/>
+          </p:cNvSpPr>
+          <p:nvPr>
+            <p:ph type="hdr" sz="quarter"/>
+          </p:nvPr>
+        </p:nvSpPr>
+        <p:spPr>
+          <a:xfrm>
+            <a:off x="0" y="0"/>
+            <a:ext cx="2971800" cy="458788"/>
+          </a:xfrm>
+          <a:prstGeom prst="rect">
+            <a:avLst/>
+          </a:prstGeom>
+        </p:spPr>
+        <p:txBody>
+          <a:bodyPr vert="horz" lIns="91440" tIns="45720" rIns="91440" bIns="45720" rtlCol="0"/>
+          <a:lstStyle>
+            <a:lvl1pPr algn="l">
+              <a:defRPr sz="1200"/>
+            </a:lvl1pPr>
+          </a:lstStyle>
+          <a:p>
+            <a:endParaRPr lang="hu-HU"/>
+          </a:p>
+        </p:txBody>
+      </p:sp>
+      <p:sp>
+        <p:nvSpPr>
+          <p:cNvPr id="3" name="Dátum helye 2"/>
+          <p:cNvSpPr>
+            <a:spLocks noGrp="1"/>
+          </p:cNvSpPr>
+          <p:nvPr>
+            <p:ph type="dt" idx="1"/>
+          </p:nvPr>
+        </p:nvSpPr>
+        <p:spPr>
+          <a:xfrm>
+            <a:off x="3884613" y="0"/>
+            <a:ext cx="2971800" cy="458788"/>
+          </a:xfrm>
+          <a:prstGeom prst="rect">
+            <a:avLst/>
+          </a:prstGeom>
+        </p:spPr>
+        <p:txBody>
+          <a:bodyPr vert="horz" lIns="91440" tIns="45720" rIns="91440" bIns="45720" rtlCol="0"/>
+          <a:lstStyle>
+            <a:lvl1pPr algn="r">
+              <a:defRPr sz="1200"/>
+            </a:lvl1pPr>
+          </a:lstStyle>
+          <a:p>
+            <a:fld id="{73E63297-FB6A-4453-B8FC-ACCF03382109}" type="datetimeFigureOut">
+              <a:rPr lang="hu-HU" smtClean="0"/>
+              <a:t>2025. 04. 06.</a:t>
+            </a:fld>
+            <a:endParaRPr lang="hu-HU"/>
+          </a:p>
+        </p:txBody>
+      </p:sp>
+      <p:sp>
+        <p:nvSpPr>
+          <p:cNvPr id="4" name="Diakép helye 3"/>
+          <p:cNvSpPr>
+            <a:spLocks noGrp="1" noRot="1" noChangeAspect="1"/>
+          </p:cNvSpPr>
+          <p:nvPr>
+            <p:ph type="sldImg" idx="2"/>
+          </p:nvPr>
+        </p:nvSpPr>
+        <p:spPr>
+          <a:xfrm>
+            <a:off x="685800" y="1143000"/>
+            <a:ext cx="5486400" cy="3086100"/>
+          </a:xfrm>
+          <a:prstGeom prst="rect">
+            <a:avLst/>
+          </a:prstGeom>
+          <a:noFill/>
+          <a:ln w="12700">
+            <a:solidFill>
+              <a:prstClr val="black"/>
+            </a:solidFill>
+          </a:ln>
+        </p:spPr>
+        <p:txBody>
+          <a:bodyPr vert="horz" lIns="91440" tIns="45720" rIns="91440" bIns="45720" rtlCol="0" anchor="ctr"/>
+          <a:lstStyle/>
+          <a:p>
+            <a:endParaRPr lang="hu-HU"/>
+          </a:p>
+        </p:txBody>
+      </p:sp>
+      <p:sp>
+        <p:nvSpPr>
+          <p:cNvPr id="5" name="Jegyzetek helye 4"/>
+          <p:cNvSpPr>
+            <a:spLocks noGrp="1"/>
+          </p:cNvSpPr>
+          <p:nvPr>
+            <p:ph type="body" sz="quarter" idx="3"/>
+          </p:nvPr>
+        </p:nvSpPr>
+        <p:spPr>
+          <a:xfrm>
+            <a:off x="685800" y="4400550"/>
+            <a:ext cx="5486400" cy="3600450"/>
+          </a:xfrm>
+          <a:prstGeom prst="rect">
+            <a:avLst/>
+          </a:prstGeom>
+        </p:spPr>
+        <p:txBody>
+          <a:bodyPr vert="horz" lIns="91440" tIns="45720" rIns="91440" bIns="45720" rtlCol="0"/>
+          <a:lstStyle/>
+          <a:p>
+            <a:pPr lvl="0"/>
+            <a:r>
+              <a:rPr lang="hu-HU"/>
+              <a:t>Mintaszöveg szerkesztése</a:t>
+            </a:r>
+          </a:p>
+          <a:p>
+            <a:pPr lvl="1"/>
+            <a:r>
+              <a:rPr lang="hu-HU"/>
+              <a:t>Második szint</a:t>
+            </a:r>
+          </a:p>
+          <a:p>
+            <a:pPr lvl="2"/>
+            <a:r>
+              <a:rPr lang="hu-HU"/>
+              <a:t>Harmadik szint</a:t>
+            </a:r>
+          </a:p>
+          <a:p>
+            <a:pPr lvl="3"/>
+            <a:r>
+              <a:rPr lang="hu-HU"/>
+              <a:t>Negyedik szint</a:t>
+            </a:r>
+          </a:p>
+          <a:p>
+            <a:pPr lvl="4"/>
+            <a:r>
+              <a:rPr lang="hu-HU"/>
+              <a:t>Ötödik szint</a:t>
+            </a:r>
+          </a:p>
+        </p:txBody>
+      </p:sp>
+      <p:sp>
+        <p:nvSpPr>
+          <p:cNvPr id="6" name="Élőláb helye 5"/>
+          <p:cNvSpPr>
+            <a:spLocks noGrp="1"/>
+          </p:cNvSpPr>
+          <p:nvPr>
+            <p:ph type="ftr" sz="quarter" idx="4"/>
+          </p:nvPr>
+        </p:nvSpPr>
+        <p:spPr>
+          <a:xfrm>
+            <a:off x="0" y="8685213"/>
+            <a:ext cx="2971800" cy="458787"/>
+          </a:xfrm>
+          <a:prstGeom prst="rect">
+            <a:avLst/>
+          </a:prstGeom>
+        </p:spPr>
+        <p:txBody>
+          <a:bodyPr vert="horz" lIns="91440" tIns="45720" rIns="91440" bIns="45720" rtlCol="0" anchor="b"/>
+          <a:lstStyle>
+            <a:lvl1pPr algn="l">
+              <a:defRPr sz="1200"/>
+            </a:lvl1pPr>
+          </a:lstStyle>
+          <a:p>
+            <a:endParaRPr lang="hu-HU"/>
+          </a:p>
+        </p:txBody>
+      </p:sp>
+      <p:sp>
+        <p:nvSpPr>
+          <p:cNvPr id="7" name="Dia számának helye 6"/>
+          <p:cNvSpPr>
+            <a:spLocks noGrp="1"/>
+          </p:cNvSpPr>
+          <p:nvPr>
+            <p:ph type="sldNum" sz="quarter" idx="5"/>
+          </p:nvPr>
+        </p:nvSpPr>
+        <p:spPr>
+          <a:xfrm>
+            <a:off x="3884613" y="8685213"/>
+            <a:ext cx="2971800" cy="458787"/>
+          </a:xfrm>
+          <a:prstGeom prst="rect">
+            <a:avLst/>
+          </a:prstGeom>
+        </p:spPr>
+        <p:txBody>
+          <a:bodyPr vert="horz" lIns="91440" tIns="45720" rIns="91440" bIns="45720" rtlCol="0" anchor="b"/>
+          <a:lstStyle>
+            <a:lvl1pPr algn="r">
+              <a:defRPr sz="1200"/>
+            </a:lvl1pPr>
+          </a:lstStyle>
+          <a:p>
+            <a:fld id="{1A420ADD-6B3A-4000-B8E0-0410BB9FCE7A}" type="slidenum">
+              <a:rPr lang="hu-HU" smtClean="0"/>
+              <a:t>‹#›</a:t>
+            </a:fld>
+            <a:endParaRPr lang="hu-HU"/>
+          </a:p>
+        </p:txBody>
+      </p:sp>
+    </p:spTree>
+    <p:extLst>
+      <p:ext uri="{BB962C8B-B14F-4D97-AF65-F5344CB8AC3E}">
+        <p14:creationId xmlns:p14="http://schemas.microsoft.com/office/powerpoint/2010/main" val="1725333827"/>
+      </p:ext>
+    </p:extLst>
+  </p:cSld>
+  <p:clrMap bg1="lt1" tx1="dk1" bg2="lt2" tx2="dk2" accent1="accent1" accent2="accent2" accent3="accent3" accent4="accent4" accent5="accent5" accent6="accent6" hlink="hlink" folHlink="folHlink"/>
+  <p:notesStyle>
+    <a:lvl1pPr marL="0" algn="l" defTabSz="914400" rtl="0" eaLnBrk="1" latinLnBrk="0" hangingPunct="1">
+      <a:defRPr sz="1200" kern="1200">
+        <a:solidFill>
+          <a:schemeClr val="tx1"/>
+        </a:solidFill>
+        <a:latin typeface="+mn-lt"/>
+        <a:ea typeface="+mn-ea"/>
+        <a:cs typeface="+mn-cs"/>
+      </a:defRPr>
+    </a:lvl1pPr>
+    <a:lvl2pPr marL="457200" algn="l" defTabSz="914400" rtl="0" eaLnBrk="1" latinLnBrk="0" hangingPunct="1">
+      <a:defRPr sz="1200" kern="1200">
+        <a:solidFill>
+          <a:schemeClr val="tx1"/>
+        </a:solidFill>
+        <a:latin typeface="+mn-lt"/>
+        <a:ea typeface="+mn-ea"/>
+        <a:cs typeface="+mn-cs"/>
+      </a:defRPr>
+    </a:lvl2pPr>
+    <a:lvl3pPr marL="914400" algn="l" defTabSz="914400" rtl="0" eaLnBrk="1" latinLnBrk="0" hangingPunct="1">
+      <a:defRPr sz="1200" kern="1200">
+        <a:solidFill>
+          <a:schemeClr val="tx1"/>
+        </a:solidFill>
+        <a:latin typeface="+mn-lt"/>
+        <a:ea typeface="+mn-ea"/>
+        <a:cs typeface="+mn-cs"/>
+      </a:defRPr>
+    </a:lvl3pPr>
+    <a:lvl4pPr marL="1371600" algn="l" defTabSz="914400" rtl="0" eaLnBrk="1" latinLnBrk="0" hangingPunct="1">
+      <a:defRPr sz="1200" kern="1200">
+        <a:solidFill>
+          <a:schemeClr val="tx1"/>
+        </a:solidFill>
+        <a:latin typeface="+mn-lt"/>
+        <a:ea typeface="+mn-ea"/>
+        <a:cs typeface="+mn-cs"/>
+      </a:defRPr>
+    </a:lvl4pPr>
+    <a:lvl5pPr marL="1828800" algn="l" defTabSz="914400" rtl="0" eaLnBrk="1" latinLnBrk="0" hangingPunct="1">
+      <a:defRPr sz="1200" kern="1200">
+        <a:solidFill>
+          <a:schemeClr val="tx1"/>
+        </a:solidFill>
+        <a:latin typeface="+mn-lt"/>
+        <a:ea typeface="+mn-ea"/>
+        <a:cs typeface="+mn-cs"/>
+      </a:defRPr>
+    </a:lvl5pPr>
+    <a:lvl6pPr marL="2286000" algn="l" defTabSz="914400" rtl="0" eaLnBrk="1" latinLnBrk="0" hangingPunct="1">
+      <a:defRPr sz="1200" kern="1200">
+        <a:solidFill>
+          <a:schemeClr val="tx1"/>
+        </a:solidFill>
+        <a:latin typeface="+mn-lt"/>
+        <a:ea typeface="+mn-ea"/>
+        <a:cs typeface="+mn-cs"/>
+      </a:defRPr>
+    </a:lvl6pPr>
+    <a:lvl7pPr marL="2743200" algn="l" defTabSz="914400" rtl="0" eaLnBrk="1" latinLnBrk="0" hangingPunct="1">
+      <a:defRPr sz="1200" kern="1200">
+        <a:solidFill>
+          <a:schemeClr val="tx1"/>
+        </a:solidFill>
+        <a:latin typeface="+mn-lt"/>
+        <a:ea typeface="+mn-ea"/>
+        <a:cs typeface="+mn-cs"/>
+      </a:defRPr>
+    </a:lvl7pPr>
+    <a:lvl8pPr marL="3200400" algn="l" defTabSz="914400" rtl="0" eaLnBrk="1" latinLnBrk="0" hangingPunct="1">
+      <a:defRPr sz="1200" kern="1200">
+        <a:solidFill>
+          <a:schemeClr val="tx1"/>
+        </a:solidFill>
+        <a:latin typeface="+mn-lt"/>
+        <a:ea typeface="+mn-ea"/>
+        <a:cs typeface="+mn-cs"/>
+      </a:defRPr>
+    </a:lvl8pPr>
+    <a:lvl9pPr marL="3657600" algn="l" defTabSz="914400" rtl="0" eaLnBrk="1" latinLnBrk="0" hangingPunct="1">
+      <a:defRPr sz="1200" kern="1200">
+        <a:solidFill>
+          <a:schemeClr val="tx1"/>
+        </a:solidFill>
+        <a:latin typeface="+mn-lt"/>
+        <a:ea typeface="+mn-ea"/>
+        <a:cs typeface="+mn-cs"/>
+      </a:defRPr>
+    </a:lvl9pPr>
+  </p:notesStyle>
+</p:notesMaster>
+</file>
+
+<file path=ppt/notesSlides/notesSlide1.xml><?xml version="1.0" encoding="utf-8"?>
+<p:notes xmlns:a="http://schemas.openxmlformats.org/drawingml/2006/main" xmlns:r="http://schemas.openxmlformats.org/officeDocument/2006/relationships" xmlns:p="http://schemas.openxmlformats.org/presentationml/2006/main">
+  <p:cSld>
+    <p:spTree>
+      <p:nvGrpSpPr>
+        <p:cNvPr id="1" name=""/>
+        <p:cNvGrpSpPr/>
+        <p:nvPr/>
+      </p:nvGrpSpPr>
+      <p:grpSpPr>
+        <a:xfrm>
+          <a:off x="0" y="0"/>
+          <a:ext cx="0" cy="0"/>
+          <a:chOff x="0" y="0"/>
+          <a:chExt cx="0" cy="0"/>
+        </a:xfrm>
+      </p:grpSpPr>
+      <p:sp>
+        <p:nvSpPr>
+          <p:cNvPr id="2" name="Diakép helye 1"/>
+          <p:cNvSpPr>
+            <a:spLocks noGrp="1" noRot="1" noChangeAspect="1"/>
+          </p:cNvSpPr>
+          <p:nvPr>
+            <p:ph type="sldImg"/>
+          </p:nvPr>
+        </p:nvSpPr>
+        <p:spPr/>
+      </p:sp>
+      <p:sp>
+        <p:nvSpPr>
+          <p:cNvPr id="3" name="Jegyzetek helye 2"/>
+          <p:cNvSpPr>
+            <a:spLocks noGrp="1"/>
+          </p:cNvSpPr>
+          <p:nvPr>
+            <p:ph type="body" idx="1"/>
+          </p:nvPr>
+        </p:nvSpPr>
+        <p:spPr/>
+        <p:txBody>
+          <a:bodyPr/>
+          <a:lstStyle/>
+          <a:p>
+            <a:endParaRPr lang="hu-HU" dirty="0"/>
+          </a:p>
+        </p:txBody>
+      </p:sp>
+      <p:sp>
+        <p:nvSpPr>
+          <p:cNvPr id="4" name="Dia számának helye 3"/>
+          <p:cNvSpPr>
+            <a:spLocks noGrp="1"/>
+          </p:cNvSpPr>
+          <p:nvPr>
+            <p:ph type="sldNum" sz="quarter" idx="5"/>
+          </p:nvPr>
+        </p:nvSpPr>
+        <p:spPr/>
+        <p:txBody>
+          <a:bodyPr/>
+          <a:lstStyle/>
+          <a:p>
+            <a:fld id="{1A420ADD-6B3A-4000-B8E0-0410BB9FCE7A}" type="slidenum">
+              <a:rPr lang="hu-HU" smtClean="0"/>
+              <a:t>3</a:t>
+            </a:fld>
+            <a:endParaRPr lang="hu-HU"/>
+          </a:p>
+        </p:txBody>
+      </p:sp>
+    </p:spTree>
+    <p:extLst>
+      <p:ext uri="{BB962C8B-B14F-4D97-AF65-F5344CB8AC3E}">
+        <p14:creationId xmlns:p14="http://schemas.microsoft.com/office/powerpoint/2010/main" val="3224167702"/>
+      </p:ext>
+    </p:extLst>
+  </p:cSld>
+  <p:clrMapOvr>
+    <a:masterClrMapping/>
+  </p:clrMapOvr>
+</p:notes>
+</file>
+
+<file path=ppt/notesSlides/notesSlide2.xml><?xml version="1.0" encoding="utf-8"?>
+<p:notes xmlns:a="http://schemas.openxmlformats.org/drawingml/2006/main" xmlns:r="http://schemas.openxmlformats.org/officeDocument/2006/relationships" xmlns:p="http://schemas.openxmlformats.org/presentationml/2006/main">
+  <p:cSld>
+    <p:spTree>
+      <p:nvGrpSpPr>
+        <p:cNvPr id="1" name=""/>
+        <p:cNvGrpSpPr/>
+        <p:nvPr/>
+      </p:nvGrpSpPr>
+      <p:grpSpPr>
+        <a:xfrm>
+          <a:off x="0" y="0"/>
+          <a:ext cx="0" cy="0"/>
+          <a:chOff x="0" y="0"/>
+          <a:chExt cx="0" cy="0"/>
+        </a:xfrm>
+      </p:grpSpPr>
+      <p:sp>
+        <p:nvSpPr>
+          <p:cNvPr id="2" name="Diakép helye 1"/>
+          <p:cNvSpPr>
+            <a:spLocks noGrp="1" noRot="1" noChangeAspect="1"/>
+          </p:cNvSpPr>
+          <p:nvPr>
+            <p:ph type="sldImg"/>
+          </p:nvPr>
+        </p:nvSpPr>
+        <p:spPr/>
+      </p:sp>
+      <p:sp>
+        <p:nvSpPr>
+          <p:cNvPr id="3" name="Jegyzetek helye 2"/>
+          <p:cNvSpPr>
+            <a:spLocks noGrp="1"/>
+          </p:cNvSpPr>
+          <p:nvPr>
+            <p:ph type="body" idx="1"/>
+          </p:nvPr>
+        </p:nvSpPr>
+        <p:spPr/>
+        <p:txBody>
+          <a:bodyPr/>
+          <a:lstStyle/>
+          <a:p>
+            <a:endParaRPr lang="hu-HU" dirty="0"/>
+          </a:p>
+        </p:txBody>
+      </p:sp>
+      <p:sp>
+        <p:nvSpPr>
+          <p:cNvPr id="4" name="Dia számának helye 3"/>
+          <p:cNvSpPr>
+            <a:spLocks noGrp="1"/>
+          </p:cNvSpPr>
+          <p:nvPr>
+            <p:ph type="sldNum" sz="quarter" idx="5"/>
+          </p:nvPr>
+        </p:nvSpPr>
+        <p:spPr/>
+        <p:txBody>
+          <a:bodyPr/>
+          <a:lstStyle/>
+          <a:p>
+            <a:fld id="{1A420ADD-6B3A-4000-B8E0-0410BB9FCE7A}" type="slidenum">
+              <a:rPr lang="hu-HU" smtClean="0"/>
+              <a:t>5</a:t>
+            </a:fld>
+            <a:endParaRPr lang="hu-HU"/>
+          </a:p>
+        </p:txBody>
+      </p:sp>
+    </p:spTree>
+    <p:extLst>
+      <p:ext uri="{BB962C8B-B14F-4D97-AF65-F5344CB8AC3E}">
+        <p14:creationId xmlns:p14="http://schemas.microsoft.com/office/powerpoint/2010/main" val="937523650"/>
+      </p:ext>
+    </p:extLst>
+  </p:cSld>
+  <p:clrMapOvr>
+    <a:masterClrMapping/>
+  </p:clrMapOvr>
+</p:notes>
 </file>
 
 <file path=ppt/slideLayouts/slideLayout1.xml><?xml version="1.0" encoding="utf-8"?>
@@ -838,7 +1363,7 @@
           <a:p>
             <a:fld id="{3650CA59-7934-473C-8D82-DC108EDC1327}" type="datetimeFigureOut">
               <a:rPr lang="hu-HU" smtClean="0"/>
-              <a:t>2025. 04. 01.</a:t>
+              <a:t>2025. 04. 06.</a:t>
             </a:fld>
             <a:endParaRPr lang="hu-HU"/>
           </a:p>
@@ -1089,7 +1614,7 @@
           <a:p>
             <a:fld id="{3650CA59-7934-473C-8D82-DC108EDC1327}" type="datetimeFigureOut">
               <a:rPr lang="hu-HU" smtClean="0"/>
-              <a:t>2025. 04. 01.</a:t>
+              <a:t>2025. 04. 06.</a:t>
             </a:fld>
             <a:endParaRPr lang="hu-HU"/>
           </a:p>
@@ -1403,7 +1928,7 @@
           <a:p>
             <a:fld id="{3650CA59-7934-473C-8D82-DC108EDC1327}" type="datetimeFigureOut">
               <a:rPr lang="hu-HU" smtClean="0"/>
-              <a:t>2025. 04. 01.</a:t>
+              <a:t>2025. 04. 06.</a:t>
             </a:fld>
             <a:endParaRPr lang="hu-HU"/>
           </a:p>
@@ -1744,7 +2269,7 @@
           <a:p>
             <a:fld id="{3650CA59-7934-473C-8D82-DC108EDC1327}" type="datetimeFigureOut">
               <a:rPr lang="hu-HU" smtClean="0"/>
-              <a:t>2025. 04. 01.</a:t>
+              <a:t>2025. 04. 06.</a:t>
             </a:fld>
             <a:endParaRPr lang="hu-HU"/>
           </a:p>
@@ -2058,7 +2583,7 @@
           <a:p>
             <a:fld id="{3650CA59-7934-473C-8D82-DC108EDC1327}" type="datetimeFigureOut">
               <a:rPr lang="hu-HU" smtClean="0"/>
-              <a:t>2025. 04. 01.</a:t>
+              <a:t>2025. 04. 06.</a:t>
             </a:fld>
             <a:endParaRPr lang="hu-HU"/>
           </a:p>
@@ -2451,7 +2976,7 @@
           <a:p>
             <a:fld id="{3650CA59-7934-473C-8D82-DC108EDC1327}" type="datetimeFigureOut">
               <a:rPr lang="hu-HU" smtClean="0"/>
-              <a:t>2025. 04. 01.</a:t>
+              <a:t>2025. 04. 06.</a:t>
             </a:fld>
             <a:endParaRPr lang="hu-HU"/>
           </a:p>
@@ -2621,7 +3146,7 @@
           <a:p>
             <a:fld id="{3650CA59-7934-473C-8D82-DC108EDC1327}" type="datetimeFigureOut">
               <a:rPr lang="hu-HU" smtClean="0"/>
-              <a:t>2025. 04. 01.</a:t>
+              <a:t>2025. 04. 06.</a:t>
             </a:fld>
             <a:endParaRPr lang="hu-HU"/>
           </a:p>
@@ -2801,7 +3326,7 @@
           <a:p>
             <a:fld id="{3650CA59-7934-473C-8D82-DC108EDC1327}" type="datetimeFigureOut">
               <a:rPr lang="hu-HU" smtClean="0"/>
-              <a:t>2025. 04. 01.</a:t>
+              <a:t>2025. 04. 06.</a:t>
             </a:fld>
             <a:endParaRPr lang="hu-HU"/>
           </a:p>
@@ -2977,7 +3502,7 @@
           <a:p>
             <a:fld id="{3650CA59-7934-473C-8D82-DC108EDC1327}" type="datetimeFigureOut">
               <a:rPr lang="hu-HU" smtClean="0"/>
-              <a:t>2025. 04. 01.</a:t>
+              <a:t>2025. 04. 06.</a:t>
             </a:fld>
             <a:endParaRPr lang="hu-HU"/>
           </a:p>
@@ -3224,7 +3749,7 @@
           <a:p>
             <a:fld id="{3650CA59-7934-473C-8D82-DC108EDC1327}" type="datetimeFigureOut">
               <a:rPr lang="hu-HU" smtClean="0"/>
-              <a:t>2025. 04. 01.</a:t>
+              <a:t>2025. 04. 06.</a:t>
             </a:fld>
             <a:endParaRPr lang="hu-HU"/>
           </a:p>
@@ -3456,7 +3981,7 @@
           <a:p>
             <a:fld id="{3650CA59-7934-473C-8D82-DC108EDC1327}" type="datetimeFigureOut">
               <a:rPr lang="hu-HU" smtClean="0"/>
-              <a:t>2025. 04. 01.</a:t>
+              <a:t>2025. 04. 06.</a:t>
             </a:fld>
             <a:endParaRPr lang="hu-HU"/>
           </a:p>
@@ -3830,7 +4355,7 @@
           <a:p>
             <a:fld id="{3650CA59-7934-473C-8D82-DC108EDC1327}" type="datetimeFigureOut">
               <a:rPr lang="hu-HU" smtClean="0"/>
-              <a:t>2025. 04. 01.</a:t>
+              <a:t>2025. 04. 06.</a:t>
             </a:fld>
             <a:endParaRPr lang="hu-HU"/>
           </a:p>
@@ -3953,7 +4478,7 @@
           <a:p>
             <a:fld id="{3650CA59-7934-473C-8D82-DC108EDC1327}" type="datetimeFigureOut">
               <a:rPr lang="hu-HU" smtClean="0"/>
-              <a:t>2025. 04. 01.</a:t>
+              <a:t>2025. 04. 06.</a:t>
             </a:fld>
             <a:endParaRPr lang="hu-HU"/>
           </a:p>
@@ -4048,7 +4573,7 @@
           <a:p>
             <a:fld id="{3650CA59-7934-473C-8D82-DC108EDC1327}" type="datetimeFigureOut">
               <a:rPr lang="hu-HU" smtClean="0"/>
-              <a:t>2025. 04. 01.</a:t>
+              <a:t>2025. 04. 06.</a:t>
             </a:fld>
             <a:endParaRPr lang="hu-HU"/>
           </a:p>
@@ -4303,7 +4828,7 @@
           <a:p>
             <a:fld id="{3650CA59-7934-473C-8D82-DC108EDC1327}" type="datetimeFigureOut">
               <a:rPr lang="hu-HU" smtClean="0"/>
-              <a:t>2025. 04. 01.</a:t>
+              <a:t>2025. 04. 06.</a:t>
             </a:fld>
             <a:endParaRPr lang="hu-HU"/>
           </a:p>
@@ -4566,7 +5091,7 @@
           <a:p>
             <a:fld id="{3650CA59-7934-473C-8D82-DC108EDC1327}" type="datetimeFigureOut">
               <a:rPr lang="hu-HU" smtClean="0"/>
-              <a:t>2025. 04. 01.</a:t>
+              <a:t>2025. 04. 06.</a:t>
             </a:fld>
             <a:endParaRPr lang="hu-HU"/>
           </a:p>
@@ -5309,7 +5834,7 @@
           <a:p>
             <a:fld id="{3650CA59-7934-473C-8D82-DC108EDC1327}" type="datetimeFigureOut">
               <a:rPr lang="hu-HU" smtClean="0"/>
-              <a:t>2025. 04. 01.</a:t>
+              <a:t>2025. 04. 06.</a:t>
             </a:fld>
             <a:endParaRPr lang="hu-HU"/>
           </a:p>
@@ -5856,10 +6381,10 @@
           <a:p>
             <a:pPr algn="ctr"/>
             <a:r>
-              <a:rPr lang="hu-HU" dirty="0" err="1"/>
+              <a:rPr lang="hu-HU" sz="6600" dirty="0" err="1"/>
               <a:t>AssettoAuto</a:t>
             </a:r>
-            <a:endParaRPr lang="hu-HU" dirty="0"/>
+            <a:endParaRPr lang="hu-HU" sz="6600" dirty="0"/>
           </a:p>
         </p:txBody>
       </p:sp>
@@ -5881,19 +6406,21 @@
         </p:nvSpPr>
         <p:spPr/>
         <p:txBody>
-          <a:bodyPr/>
-          <a:lstStyle/>
-          <a:p>
-            <a:r>
-              <a:rPr lang="hu-HU" dirty="0"/>
+          <a:bodyPr>
+            <a:normAutofit/>
+          </a:bodyPr>
+          <a:lstStyle/>
+          <a:p>
+            <a:r>
+              <a:rPr lang="hu-HU" sz="2000" dirty="0"/>
               <a:t>Készítette: </a:t>
             </a:r>
             <a:r>
-              <a:rPr lang="hu-HU" dirty="0" err="1"/>
+              <a:rPr lang="hu-HU" sz="2000" dirty="0" err="1"/>
               <a:t>Gavala</a:t>
             </a:r>
             <a:r>
-              <a:rPr lang="hu-HU" dirty="0"/>
+              <a:rPr lang="hu-HU" sz="2000" dirty="0"/>
               <a:t> Norbert, Tulák Marcell Bence</a:t>
             </a:r>
           </a:p>
@@ -6030,11 +6557,13 @@
         </p:nvSpPr>
         <p:spPr/>
         <p:txBody>
-          <a:bodyPr/>
-          <a:lstStyle/>
-          <a:p>
-            <a:r>
-              <a:rPr lang="hu-HU" dirty="0"/>
+          <a:bodyPr>
+            <a:normAutofit/>
+          </a:bodyPr>
+          <a:lstStyle/>
+          <a:p>
+            <a:r>
+              <a:rPr lang="hu-HU" sz="4400" dirty="0"/>
               <a:t>Célkitűzés és probléma</a:t>
             </a:r>
           </a:p>
@@ -6062,19 +6591,19 @@
           <a:lstStyle/>
           <a:p>
             <a:r>
-              <a:rPr lang="hu-HU" sz="2800" dirty="0"/>
+              <a:rPr lang="hu-HU" sz="3200" dirty="0"/>
               <a:t>Ingyenes</a:t>
             </a:r>
           </a:p>
           <a:p>
             <a:r>
-              <a:rPr lang="hu-HU" sz="2800" dirty="0"/>
+              <a:rPr lang="hu-HU" sz="3200" dirty="0"/>
               <a:t>Letisztult</a:t>
             </a:r>
           </a:p>
           <a:p>
             <a:r>
-              <a:rPr lang="hu-HU" sz="2800" dirty="0"/>
+              <a:rPr lang="hu-HU" sz="3200" dirty="0"/>
               <a:t>Modern megjelenésű használtautó portál</a:t>
             </a:r>
           </a:p>
@@ -6131,11 +6660,13 @@
         </p:nvSpPr>
         <p:spPr/>
         <p:txBody>
-          <a:bodyPr/>
-          <a:lstStyle/>
-          <a:p>
-            <a:r>
-              <a:rPr lang="hu-HU" dirty="0"/>
+          <a:bodyPr>
+            <a:normAutofit/>
+          </a:bodyPr>
+          <a:lstStyle/>
+          <a:p>
+            <a:r>
+              <a:rPr lang="hu-HU" sz="4400" dirty="0"/>
               <a:t>Munkamegosztás</a:t>
             </a:r>
           </a:p>
@@ -6170,19 +6701,19 @@
           <a:lstStyle/>
           <a:p>
             <a:r>
-              <a:rPr lang="hu-HU" sz="2800" dirty="0" err="1"/>
+              <a:rPr lang="hu-HU" sz="3200" dirty="0" err="1"/>
               <a:t>Gavala</a:t>
             </a:r>
             <a:r>
-              <a:rPr lang="hu-HU" sz="2800" dirty="0"/>
+              <a:rPr lang="hu-HU" sz="3200" dirty="0"/>
               <a:t> Norbert: Frontend, Trello, </a:t>
             </a:r>
             <a:r>
-              <a:rPr lang="hu-HU" sz="2800" dirty="0" err="1"/>
+              <a:rPr lang="hu-HU" sz="3200" dirty="0" err="1"/>
               <a:t>Github</a:t>
             </a:r>
             <a:r>
-              <a:rPr lang="hu-HU" sz="2800" dirty="0"/>
+              <a:rPr lang="hu-HU" sz="3200" dirty="0"/>
               <a:t>, Prezentáció</a:t>
             </a:r>
           </a:p>
@@ -6236,11 +6767,13 @@
         </p:nvSpPr>
         <p:spPr/>
         <p:txBody>
-          <a:bodyPr/>
-          <a:lstStyle/>
-          <a:p>
-            <a:r>
-              <a:rPr lang="hu-HU" dirty="0"/>
+          <a:bodyPr>
+            <a:normAutofit/>
+          </a:bodyPr>
+          <a:lstStyle/>
+          <a:p>
+            <a:r>
+              <a:rPr lang="hu-HU" sz="4400" dirty="0"/>
               <a:t>Munkamegosztás</a:t>
             </a:r>
           </a:p>
@@ -6275,7 +6808,7 @@
           <a:lstStyle/>
           <a:p>
             <a:r>
-              <a:rPr lang="hu-HU" sz="2800" dirty="0"/>
+              <a:rPr lang="hu-HU" sz="3200" dirty="0"/>
               <a:t>Tulák Marcell Bence: Backend, Asztali alkalmazás, Dokumentáció</a:t>
             </a:r>
           </a:p>
@@ -6329,11 +6862,13 @@
         </p:nvSpPr>
         <p:spPr/>
         <p:txBody>
-          <a:bodyPr/>
-          <a:lstStyle/>
-          <a:p>
-            <a:r>
-              <a:rPr lang="hu-HU" dirty="0"/>
+          <a:bodyPr>
+            <a:normAutofit/>
+          </a:bodyPr>
+          <a:lstStyle/>
+          <a:p>
+            <a:r>
+              <a:rPr lang="hu-HU" sz="4400" dirty="0"/>
               <a:t>Technológiák</a:t>
             </a:r>
           </a:p>
@@ -6355,7 +6890,12 @@
             <p:ph idx="1"/>
           </p:nvPr>
         </p:nvSpPr>
-        <p:spPr/>
+        <p:spPr>
+          <a:xfrm>
+            <a:off x="677334" y="2160589"/>
+            <a:ext cx="8596668" cy="4550929"/>
+          </a:xfrm>
+        </p:spPr>
         <p:txBody>
           <a:bodyPr>
             <a:normAutofit/>
@@ -6363,49 +6903,287 @@
           <a:lstStyle/>
           <a:p>
             <a:r>
-              <a:rPr lang="hu-HU" sz="2800" dirty="0"/>
+              <a:rPr lang="hu-HU" sz="3200" dirty="0"/>
               <a:t>React.js</a:t>
             </a:r>
           </a:p>
           <a:p>
             <a:r>
-              <a:rPr lang="hu-HU" sz="2800" dirty="0"/>
+              <a:rPr lang="hu-HU" sz="3200" dirty="0"/>
               <a:t>ASP.NET</a:t>
             </a:r>
           </a:p>
           <a:p>
             <a:r>
-              <a:rPr lang="hu-HU" sz="2800" dirty="0"/>
+              <a:rPr lang="hu-HU" sz="3200" dirty="0"/>
               <a:t>WPF</a:t>
             </a:r>
           </a:p>
           <a:p>
             <a:r>
-              <a:rPr lang="hu-HU" sz="2800" dirty="0"/>
+              <a:rPr lang="hu-HU" sz="3200" dirty="0"/>
               <a:t>FTP szerver</a:t>
             </a:r>
           </a:p>
           <a:p>
             <a:r>
-              <a:rPr lang="hu-HU" sz="2800" dirty="0"/>
+              <a:rPr lang="hu-HU" sz="3200" dirty="0"/>
               <a:t>MySQL</a:t>
             </a:r>
           </a:p>
           <a:p>
             <a:r>
-              <a:rPr lang="hu-HU" sz="2800" dirty="0" err="1"/>
+              <a:rPr lang="hu-HU" sz="3200" dirty="0" err="1"/>
               <a:t>Github</a:t>
             </a:r>
-            <a:endParaRPr lang="hu-HU" sz="2800" dirty="0"/>
-          </a:p>
-          <a:p>
-            <a:r>
-              <a:rPr lang="hu-HU" sz="2800" dirty="0"/>
+            <a:endParaRPr lang="hu-HU" sz="3200" dirty="0"/>
+          </a:p>
+          <a:p>
+            <a:r>
+              <a:rPr lang="hu-HU" sz="3200" dirty="0"/>
               <a:t>Trello</a:t>
             </a:r>
           </a:p>
         </p:txBody>
       </p:sp>
+      <p:pic>
+        <p:nvPicPr>
+          <p:cNvPr id="1026" name="Picture 2" descr="Everything you need to know About ReactJS - What is react used for ?">
+            <a:extLst>
+              <a:ext uri="{FF2B5EF4-FFF2-40B4-BE49-F238E27FC236}">
+                <a16:creationId xmlns:a16="http://schemas.microsoft.com/office/drawing/2014/main" id="{E37AAEA4-7121-6F1E-4CA6-8BDDAD286111}"/>
+              </a:ext>
+            </a:extLst>
+          </p:cNvPr>
+          <p:cNvPicPr>
+            <a:picLocks noChangeAspect="1" noChangeArrowheads="1"/>
+          </p:cNvPicPr>
+          <p:nvPr/>
+        </p:nvPicPr>
+        <p:blipFill>
+          <a:blip r:embed="rId3">
+            <a:extLst>
+              <a:ext uri="{28A0092B-C50C-407E-A947-70E740481C1C}">
+                <a14:useLocalDpi xmlns:a14="http://schemas.microsoft.com/office/drawing/2010/main" val="0"/>
+              </a:ext>
+            </a:extLst>
+          </a:blip>
+          <a:srcRect/>
+          <a:stretch>
+            <a:fillRect/>
+          </a:stretch>
+        </p:blipFill>
+        <p:spPr bwMode="auto">
+          <a:xfrm>
+            <a:off x="4673866" y="36604"/>
+            <a:ext cx="2090918" cy="1478358"/>
+          </a:xfrm>
+          <a:prstGeom prst="rect">
+            <a:avLst/>
+          </a:prstGeom>
+          <a:noFill/>
+          <a:extLst>
+            <a:ext uri="{909E8E84-426E-40DD-AFC4-6F175D3DCCD1}">
+              <a14:hiddenFill xmlns:a14="http://schemas.microsoft.com/office/drawing/2010/main">
+                <a:solidFill>
+                  <a:srgbClr val="FFFFFF"/>
+                </a:solidFill>
+              </a14:hiddenFill>
+            </a:ext>
+          </a:extLst>
+        </p:spPr>
+      </p:pic>
+      <p:pic>
+        <p:nvPicPr>
+          <p:cNvPr id="1028" name="Picture 4" descr="nethely.hu profilja">
+            <a:extLst>
+              <a:ext uri="{FF2B5EF4-FFF2-40B4-BE49-F238E27FC236}">
+                <a16:creationId xmlns:a16="http://schemas.microsoft.com/office/drawing/2014/main" id="{9B29C5F5-35F6-0038-EF57-269B258FA92F}"/>
+              </a:ext>
+            </a:extLst>
+          </p:cNvPr>
+          <p:cNvPicPr>
+            <a:picLocks noChangeAspect="1" noChangeArrowheads="1"/>
+          </p:cNvPicPr>
+          <p:nvPr/>
+        </p:nvPicPr>
+        <p:blipFill>
+          <a:blip r:embed="rId4">
+            <a:extLst>
+              <a:ext uri="{28A0092B-C50C-407E-A947-70E740481C1C}">
+                <a14:useLocalDpi xmlns:a14="http://schemas.microsoft.com/office/drawing/2010/main" val="0"/>
+              </a:ext>
+            </a:extLst>
+          </a:blip>
+          <a:srcRect/>
+          <a:stretch>
+            <a:fillRect/>
+          </a:stretch>
+        </p:blipFill>
+        <p:spPr bwMode="auto">
+          <a:xfrm>
+            <a:off x="4887609" y="2532353"/>
+            <a:ext cx="1125247" cy="1125247"/>
+          </a:xfrm>
+          <a:prstGeom prst="rect">
+            <a:avLst/>
+          </a:prstGeom>
+          <a:noFill/>
+          <a:extLst>
+            <a:ext uri="{909E8E84-426E-40DD-AFC4-6F175D3DCCD1}">
+              <a14:hiddenFill xmlns:a14="http://schemas.microsoft.com/office/drawing/2010/main">
+                <a:solidFill>
+                  <a:srgbClr val="FFFFFF"/>
+                </a:solidFill>
+              </a14:hiddenFill>
+            </a:ext>
+          </a:extLst>
+        </p:spPr>
+      </p:pic>
+      <p:pic>
+        <p:nvPicPr>
+          <p:cNvPr id="13" name="Ábra 12">
+            <a:extLst>
+              <a:ext uri="{FF2B5EF4-FFF2-40B4-BE49-F238E27FC236}">
+                <a16:creationId xmlns:a16="http://schemas.microsoft.com/office/drawing/2014/main" id="{28C5D314-B9AD-13B4-39B5-F75162E4764B}"/>
+              </a:ext>
+            </a:extLst>
+          </p:cNvPr>
+          <p:cNvPicPr>
+            <a:picLocks noChangeAspect="1"/>
+          </p:cNvPicPr>
+          <p:nvPr/>
+        </p:nvPicPr>
+        <p:blipFill>
+          <a:blip r:embed="rId5">
+            <a:extLst>
+              <a:ext uri="{96DAC541-7B7A-43D3-8B79-37D633B846F1}">
+                <asvg:svgBlip xmlns:asvg="http://schemas.microsoft.com/office/drawing/2016/SVG/main" r:embed="rId6"/>
+              </a:ext>
+            </a:extLst>
+          </a:blip>
+          <a:stretch>
+            <a:fillRect/>
+          </a:stretch>
+        </p:blipFill>
+        <p:spPr>
+          <a:xfrm>
+            <a:off x="7304392" y="3018385"/>
+            <a:ext cx="1977106" cy="1977106"/>
+          </a:xfrm>
+          <a:prstGeom prst="rect">
+            <a:avLst/>
+          </a:prstGeom>
+        </p:spPr>
+      </p:pic>
+      <p:pic>
+        <p:nvPicPr>
+          <p:cNvPr id="15" name="Kép 14">
+            <a:extLst>
+              <a:ext uri="{FF2B5EF4-FFF2-40B4-BE49-F238E27FC236}">
+                <a16:creationId xmlns:a16="http://schemas.microsoft.com/office/drawing/2014/main" id="{57A4835B-E3DD-F2C6-E3C9-D10F4EA3F34B}"/>
+              </a:ext>
+            </a:extLst>
+          </p:cNvPr>
+          <p:cNvPicPr>
+            <a:picLocks noChangeAspect="1"/>
+          </p:cNvPicPr>
+          <p:nvPr/>
+        </p:nvPicPr>
+        <p:blipFill>
+          <a:blip r:embed="rId7">
+            <a:extLst>
+              <a:ext uri="{28A0092B-C50C-407E-A947-70E740481C1C}">
+                <a14:useLocalDpi xmlns:a14="http://schemas.microsoft.com/office/drawing/2010/main" val="0"/>
+              </a:ext>
+            </a:extLst>
+          </a:blip>
+          <a:stretch>
+            <a:fillRect/>
+          </a:stretch>
+        </p:blipFill>
+        <p:spPr>
+          <a:xfrm>
+            <a:off x="5010313" y="4689899"/>
+            <a:ext cx="1195180" cy="1195180"/>
+          </a:xfrm>
+          <a:prstGeom prst="rect">
+            <a:avLst/>
+          </a:prstGeom>
+        </p:spPr>
+      </p:pic>
+      <p:pic>
+        <p:nvPicPr>
+          <p:cNvPr id="17" name="Kép 16">
+            <a:extLst>
+              <a:ext uri="{FF2B5EF4-FFF2-40B4-BE49-F238E27FC236}">
+                <a16:creationId xmlns:a16="http://schemas.microsoft.com/office/drawing/2014/main" id="{F98CD4F9-D255-DAA4-93A1-92B63D0FB41A}"/>
+              </a:ext>
+            </a:extLst>
+          </p:cNvPr>
+          <p:cNvPicPr>
+            <a:picLocks noChangeAspect="1"/>
+          </p:cNvPicPr>
+          <p:nvPr/>
+        </p:nvPicPr>
+        <p:blipFill>
+          <a:blip r:embed="rId8">
+            <a:extLst>
+              <a:ext uri="{28A0092B-C50C-407E-A947-70E740481C1C}">
+                <a14:useLocalDpi xmlns:a14="http://schemas.microsoft.com/office/drawing/2010/main" val="0"/>
+              </a:ext>
+            </a:extLst>
+          </a:blip>
+          <a:stretch>
+            <a:fillRect/>
+          </a:stretch>
+        </p:blipFill>
+        <p:spPr>
+          <a:xfrm>
+            <a:off x="7433668" y="5726096"/>
+            <a:ext cx="985421" cy="985421"/>
+          </a:xfrm>
+          <a:prstGeom prst="rect">
+            <a:avLst/>
+          </a:prstGeom>
+        </p:spPr>
+      </p:pic>
+      <p:pic>
+        <p:nvPicPr>
+          <p:cNvPr id="19" name="Kép 18">
+            <a:extLst>
+              <a:ext uri="{FF2B5EF4-FFF2-40B4-BE49-F238E27FC236}">
+                <a16:creationId xmlns:a16="http://schemas.microsoft.com/office/drawing/2014/main" id="{C042798F-BA1C-C7C2-CAD9-923FFCB2D5B2}"/>
+              </a:ext>
+            </a:extLst>
+          </p:cNvPr>
+          <p:cNvPicPr>
+            <a:picLocks noChangeAspect="1"/>
+          </p:cNvPicPr>
+          <p:nvPr/>
+        </p:nvPicPr>
+        <p:blipFill>
+          <a:blip r:embed="rId9">
+            <a:extLst>
+              <a:ext uri="{28A0092B-C50C-407E-A947-70E740481C1C}">
+                <a14:useLocalDpi xmlns:a14="http://schemas.microsoft.com/office/drawing/2010/main" val="0"/>
+              </a:ext>
+            </a:extLst>
+          </a:blip>
+          <a:stretch>
+            <a:fillRect/>
+          </a:stretch>
+        </p:blipFill>
+        <p:spPr>
+          <a:xfrm>
+            <a:off x="7098690" y="984740"/>
+            <a:ext cx="1157543" cy="1157543"/>
+          </a:xfrm>
+          <a:prstGeom prst="rect">
+            <a:avLst/>
+          </a:prstGeom>
+        </p:spPr>
+      </p:pic>
     </p:spTree>
     <p:extLst>
       <p:ext uri="{BB962C8B-B14F-4D97-AF65-F5344CB8AC3E}">
@@ -6416,6 +7194,354 @@
   <p:clrMapOvr>
     <a:masterClrMapping/>
   </p:clrMapOvr>
+  <p:timing>
+    <p:tnLst>
+      <p:par>
+        <p:cTn id="1" dur="indefinite" restart="never" nodeType="tmRoot">
+          <p:childTnLst>
+            <p:seq concurrent="1" nextAc="seek">
+              <p:cTn id="2" dur="indefinite" nodeType="mainSeq">
+                <p:childTnLst>
+                  <p:par>
+                    <p:cTn id="3" fill="hold">
+                      <p:stCondLst>
+                        <p:cond delay="indefinite"/>
+                      </p:stCondLst>
+                      <p:childTnLst>
+                        <p:par>
+                          <p:cTn id="4" fill="hold">
+                            <p:stCondLst>
+                              <p:cond delay="0"/>
+                            </p:stCondLst>
+                            <p:childTnLst>
+                              <p:par>
+                                <p:cTn id="5" presetID="10" presetClass="entr" presetSubtype="0" fill="hold" nodeType="clickEffect">
+                                  <p:stCondLst>
+                                    <p:cond delay="0"/>
+                                  </p:stCondLst>
+                                  <p:childTnLst>
+                                    <p:set>
+                                      <p:cBhvr>
+                                        <p:cTn id="6" dur="1" fill="hold">
+                                          <p:stCondLst>
+                                            <p:cond delay="0"/>
+                                          </p:stCondLst>
+                                        </p:cTn>
+                                        <p:tgtEl>
+                                          <p:spTgt spid="1026"/>
+                                        </p:tgtEl>
+                                        <p:attrNameLst>
+                                          <p:attrName>style.visibility</p:attrName>
+                                        </p:attrNameLst>
+                                      </p:cBhvr>
+                                      <p:to>
+                                        <p:strVal val="visible"/>
+                                      </p:to>
+                                    </p:set>
+                                    <p:animEffect transition="in" filter="fade">
+                                      <p:cBhvr>
+                                        <p:cTn id="7" dur="1000"/>
+                                        <p:tgtEl>
+                                          <p:spTgt spid="1026"/>
+                                        </p:tgtEl>
+                                      </p:cBhvr>
+                                    </p:animEffect>
+                                  </p:childTnLst>
+                                </p:cTn>
+                              </p:par>
+                            </p:childTnLst>
+                          </p:cTn>
+                        </p:par>
+                      </p:childTnLst>
+                    </p:cTn>
+                  </p:par>
+                  <p:par>
+                    <p:cTn id="8" fill="hold">
+                      <p:stCondLst>
+                        <p:cond delay="indefinite"/>
+                      </p:stCondLst>
+                      <p:childTnLst>
+                        <p:par>
+                          <p:cTn id="9" fill="hold">
+                            <p:stCondLst>
+                              <p:cond delay="0"/>
+                            </p:stCondLst>
+                            <p:childTnLst>
+                              <p:par>
+                                <p:cTn id="10" presetID="10" presetClass="entr" presetSubtype="0" fill="hold" nodeType="clickEffect">
+                                  <p:stCondLst>
+                                    <p:cond delay="0"/>
+                                  </p:stCondLst>
+                                  <p:childTnLst>
+                                    <p:set>
+                                      <p:cBhvr>
+                                        <p:cTn id="11" dur="1" fill="hold">
+                                          <p:stCondLst>
+                                            <p:cond delay="0"/>
+                                          </p:stCondLst>
+                                        </p:cTn>
+                                        <p:tgtEl>
+                                          <p:spTgt spid="19"/>
+                                        </p:tgtEl>
+                                        <p:attrNameLst>
+                                          <p:attrName>style.visibility</p:attrName>
+                                        </p:attrNameLst>
+                                      </p:cBhvr>
+                                      <p:to>
+                                        <p:strVal val="visible"/>
+                                      </p:to>
+                                    </p:set>
+                                    <p:animEffect transition="in" filter="fade">
+                                      <p:cBhvr>
+                                        <p:cTn id="12" dur="1000"/>
+                                        <p:tgtEl>
+                                          <p:spTgt spid="19"/>
+                                        </p:tgtEl>
+                                      </p:cBhvr>
+                                    </p:animEffect>
+                                  </p:childTnLst>
+                                </p:cTn>
+                              </p:par>
+                            </p:childTnLst>
+                          </p:cTn>
+                        </p:par>
+                      </p:childTnLst>
+                    </p:cTn>
+                  </p:par>
+                  <p:par>
+                    <p:cTn id="13" fill="hold">
+                      <p:stCondLst>
+                        <p:cond delay="indefinite"/>
+                      </p:stCondLst>
+                      <p:childTnLst>
+                        <p:par>
+                          <p:cTn id="14" fill="hold">
+                            <p:stCondLst>
+                              <p:cond delay="0"/>
+                            </p:stCondLst>
+                            <p:childTnLst>
+                              <p:par>
+                                <p:cTn id="15" presetID="10" presetClass="entr" presetSubtype="0" fill="hold" nodeType="clickEffect">
+                                  <p:stCondLst>
+                                    <p:cond delay="0"/>
+                                  </p:stCondLst>
+                                  <p:childTnLst>
+                                    <p:set>
+                                      <p:cBhvr>
+                                        <p:cTn id="16" dur="1" fill="hold">
+                                          <p:stCondLst>
+                                            <p:cond delay="0"/>
+                                          </p:stCondLst>
+                                        </p:cTn>
+                                        <p:tgtEl>
+                                          <p:spTgt spid="1028"/>
+                                        </p:tgtEl>
+                                        <p:attrNameLst>
+                                          <p:attrName>style.visibility</p:attrName>
+                                        </p:attrNameLst>
+                                      </p:cBhvr>
+                                      <p:to>
+                                        <p:strVal val="visible"/>
+                                      </p:to>
+                                    </p:set>
+                                    <p:animEffect transition="in" filter="fade">
+                                      <p:cBhvr>
+                                        <p:cTn id="17" dur="1000"/>
+                                        <p:tgtEl>
+                                          <p:spTgt spid="1028"/>
+                                        </p:tgtEl>
+                                      </p:cBhvr>
+                                    </p:animEffect>
+                                  </p:childTnLst>
+                                </p:cTn>
+                              </p:par>
+                            </p:childTnLst>
+                          </p:cTn>
+                        </p:par>
+                      </p:childTnLst>
+                    </p:cTn>
+                  </p:par>
+                  <p:par>
+                    <p:cTn id="18" fill="hold">
+                      <p:stCondLst>
+                        <p:cond delay="indefinite"/>
+                      </p:stCondLst>
+                      <p:childTnLst>
+                        <p:par>
+                          <p:cTn id="19" fill="hold">
+                            <p:stCondLst>
+                              <p:cond delay="0"/>
+                            </p:stCondLst>
+                            <p:childTnLst>
+                              <p:par>
+                                <p:cTn id="20" presetID="10" presetClass="entr" presetSubtype="0" fill="hold" nodeType="clickEffect">
+                                  <p:stCondLst>
+                                    <p:cond delay="0"/>
+                                  </p:stCondLst>
+                                  <p:childTnLst>
+                                    <p:set>
+                                      <p:cBhvr>
+                                        <p:cTn id="21" dur="1" fill="hold">
+                                          <p:stCondLst>
+                                            <p:cond delay="0"/>
+                                          </p:stCondLst>
+                                        </p:cTn>
+                                        <p:tgtEl>
+                                          <p:spTgt spid="13"/>
+                                        </p:tgtEl>
+                                        <p:attrNameLst>
+                                          <p:attrName>style.visibility</p:attrName>
+                                        </p:attrNameLst>
+                                      </p:cBhvr>
+                                      <p:to>
+                                        <p:strVal val="visible"/>
+                                      </p:to>
+                                    </p:set>
+                                    <p:animEffect transition="in" filter="fade">
+                                      <p:cBhvr>
+                                        <p:cTn id="22" dur="1000"/>
+                                        <p:tgtEl>
+                                          <p:spTgt spid="13"/>
+                                        </p:tgtEl>
+                                      </p:cBhvr>
+                                    </p:animEffect>
+                                  </p:childTnLst>
+                                </p:cTn>
+                              </p:par>
+                            </p:childTnLst>
+                          </p:cTn>
+                        </p:par>
+                      </p:childTnLst>
+                    </p:cTn>
+                  </p:par>
+                  <p:par>
+                    <p:cTn id="23" fill="hold">
+                      <p:stCondLst>
+                        <p:cond delay="indefinite"/>
+                      </p:stCondLst>
+                      <p:childTnLst>
+                        <p:par>
+                          <p:cTn id="24" fill="hold">
+                            <p:stCondLst>
+                              <p:cond delay="0"/>
+                            </p:stCondLst>
+                            <p:childTnLst>
+                              <p:par>
+                                <p:cTn id="25" presetID="10" presetClass="entr" presetSubtype="0" fill="hold" nodeType="clickEffect">
+                                  <p:stCondLst>
+                                    <p:cond delay="0"/>
+                                  </p:stCondLst>
+                                  <p:childTnLst>
+                                    <p:set>
+                                      <p:cBhvr>
+                                        <p:cTn id="26" dur="1" fill="hold">
+                                          <p:stCondLst>
+                                            <p:cond delay="0"/>
+                                          </p:stCondLst>
+                                        </p:cTn>
+                                        <p:tgtEl>
+                                          <p:spTgt spid="15"/>
+                                        </p:tgtEl>
+                                        <p:attrNameLst>
+                                          <p:attrName>style.visibility</p:attrName>
+                                        </p:attrNameLst>
+                                      </p:cBhvr>
+                                      <p:to>
+                                        <p:strVal val="visible"/>
+                                      </p:to>
+                                    </p:set>
+                                    <p:animEffect transition="in" filter="fade">
+                                      <p:cBhvr>
+                                        <p:cTn id="27" dur="1000"/>
+                                        <p:tgtEl>
+                                          <p:spTgt spid="15"/>
+                                        </p:tgtEl>
+                                      </p:cBhvr>
+                                    </p:animEffect>
+                                  </p:childTnLst>
+                                </p:cTn>
+                              </p:par>
+                            </p:childTnLst>
+                          </p:cTn>
+                        </p:par>
+                      </p:childTnLst>
+                    </p:cTn>
+                  </p:par>
+                  <p:par>
+                    <p:cTn id="28" fill="hold">
+                      <p:stCondLst>
+                        <p:cond delay="indefinite"/>
+                      </p:stCondLst>
+                      <p:childTnLst>
+                        <p:par>
+                          <p:cTn id="29" fill="hold">
+                            <p:stCondLst>
+                              <p:cond delay="0"/>
+                            </p:stCondLst>
+                            <p:childTnLst>
+                              <p:par>
+                                <p:cTn id="30" presetID="10" presetClass="entr" presetSubtype="0" fill="hold" nodeType="clickEffect">
+                                  <p:stCondLst>
+                                    <p:cond delay="0"/>
+                                  </p:stCondLst>
+                                  <p:childTnLst>
+                                    <p:set>
+                                      <p:cBhvr>
+                                        <p:cTn id="31" dur="1" fill="hold">
+                                          <p:stCondLst>
+                                            <p:cond delay="0"/>
+                                          </p:stCondLst>
+                                        </p:cTn>
+                                        <p:tgtEl>
+                                          <p:spTgt spid="17"/>
+                                        </p:tgtEl>
+                                        <p:attrNameLst>
+                                          <p:attrName>style.visibility</p:attrName>
+                                        </p:attrNameLst>
+                                      </p:cBhvr>
+                                      <p:to>
+                                        <p:strVal val="visible"/>
+                                      </p:to>
+                                    </p:set>
+                                    <p:animEffect transition="in" filter="fade">
+                                      <p:cBhvr>
+                                        <p:cTn id="32" dur="1000"/>
+                                        <p:tgtEl>
+                                          <p:spTgt spid="17"/>
+                                        </p:tgtEl>
+                                      </p:cBhvr>
+                                    </p:animEffect>
+                                  </p:childTnLst>
+                                </p:cTn>
+                              </p:par>
+                            </p:childTnLst>
+                          </p:cTn>
+                        </p:par>
+                      </p:childTnLst>
+                    </p:cTn>
+                  </p:par>
+                </p:childTnLst>
+              </p:cTn>
+              <p:prevCondLst>
+                <p:cond evt="onPrev" delay="0">
+                  <p:tgtEl>
+                    <p:sldTgt/>
+                  </p:tgtEl>
+                </p:cond>
+              </p:prevCondLst>
+              <p:nextCondLst>
+                <p:cond evt="onNext" delay="0">
+                  <p:tgtEl>
+                    <p:sldTgt/>
+                  </p:tgtEl>
+                </p:cond>
+              </p:nextCondLst>
+            </p:seq>
+          </p:childTnLst>
+        </p:cTn>
+      </p:par>
+    </p:tnLst>
+  </p:timing>
 </p:sld>
 </file>
 
@@ -6454,11 +7580,13 @@
         </p:nvSpPr>
         <p:spPr/>
         <p:txBody>
-          <a:bodyPr/>
-          <a:lstStyle/>
-          <a:p>
-            <a:r>
-              <a:rPr lang="hu-HU" dirty="0"/>
+          <a:bodyPr>
+            <a:normAutofit/>
+          </a:bodyPr>
+          <a:lstStyle/>
+          <a:p>
+            <a:r>
+              <a:rPr lang="hu-HU" sz="4400" dirty="0"/>
               <a:t>Funkciók	</a:t>
             </a:r>
           </a:p>
@@ -6482,24 +7610,26 @@
         </p:nvSpPr>
         <p:spPr/>
         <p:txBody>
-          <a:bodyPr/>
-          <a:lstStyle/>
-          <a:p>
-            <a:r>
-              <a:rPr lang="hu-HU" dirty="0"/>
-              <a:t>Felhasználókat tudunk kezelni</a:t>
-            </a:r>
-          </a:p>
-          <a:p>
-            <a:r>
-              <a:rPr lang="hu-HU" dirty="0"/>
-              <a:t>Tulajdonságok alapján tudunk hirdetéseket megjeleníteni</a:t>
-            </a:r>
-          </a:p>
-          <a:p>
-            <a:r>
-              <a:rPr lang="hu-HU" dirty="0"/>
-              <a:t>A felhasználó képeket tud feltölteni a hirdetésekhez</a:t>
+          <a:bodyPr>
+            <a:normAutofit/>
+          </a:bodyPr>
+          <a:lstStyle/>
+          <a:p>
+            <a:r>
+              <a:rPr lang="hu-HU" sz="3200" dirty="0"/>
+              <a:t>Felhasználók kezelése</a:t>
+            </a:r>
+          </a:p>
+          <a:p>
+            <a:r>
+              <a:rPr lang="hu-HU" sz="3200" dirty="0"/>
+              <a:t>Tulajdonságok alapján hirdetés keresés</a:t>
+            </a:r>
+          </a:p>
+          <a:p>
+            <a:r>
+              <a:rPr lang="hu-HU" sz="3200" dirty="0"/>
+              <a:t>Képek feltöltése hirdetéshez</a:t>
             </a:r>
           </a:p>
         </p:txBody>
@@ -6552,11 +7682,13 @@
         </p:nvSpPr>
         <p:spPr/>
         <p:txBody>
-          <a:bodyPr/>
-          <a:lstStyle/>
-          <a:p>
-            <a:r>
-              <a:rPr lang="hu-HU" dirty="0"/>
+          <a:bodyPr>
+            <a:normAutofit/>
+          </a:bodyPr>
+          <a:lstStyle/>
+          <a:p>
+            <a:r>
+              <a:rPr lang="hu-HU" sz="4400" dirty="0"/>
               <a:t>Fejlesztési folyamat</a:t>
             </a:r>
           </a:p>
@@ -6715,15 +7847,17 @@
         </p:nvSpPr>
         <p:spPr/>
         <p:txBody>
-          <a:bodyPr/>
-          <a:lstStyle/>
-          <a:p>
-            <a:r>
-              <a:rPr lang="hu-HU" dirty="0" err="1"/>
+          <a:bodyPr>
+            <a:normAutofit/>
+          </a:bodyPr>
+          <a:lstStyle/>
+          <a:p>
+            <a:r>
+              <a:rPr lang="hu-HU" sz="4400" dirty="0" err="1"/>
               <a:t>Jövöbeli</a:t>
             </a:r>
             <a:r>
-              <a:rPr lang="hu-HU" dirty="0"/>
+              <a:rPr lang="hu-HU" sz="4400" dirty="0"/>
               <a:t> tervek</a:t>
             </a:r>
           </a:p>
@@ -6753,19 +7887,19 @@
           <a:lstStyle/>
           <a:p>
             <a:r>
-              <a:rPr lang="hu-HU" sz="2800" dirty="0"/>
+              <a:rPr lang="hu-HU" sz="3200" dirty="0"/>
               <a:t>Mobilalkalmazás</a:t>
             </a:r>
           </a:p>
           <a:p>
             <a:r>
-              <a:rPr lang="hu-HU" sz="2800" dirty="0"/>
+              <a:rPr lang="hu-HU" sz="3200" dirty="0"/>
               <a:t>Dokumentum feltöltés</a:t>
             </a:r>
           </a:p>
           <a:p>
             <a:r>
-              <a:rPr lang="hu-HU" sz="2800" dirty="0"/>
+              <a:rPr lang="hu-HU" sz="3200" dirty="0"/>
               <a:t>AI javaslatok</a:t>
             </a:r>
           </a:p>
@@ -7039,4 +8173,299 @@
     </a:ext>
   </a:extLst>
 </a:theme>
+</file>
+
+<file path=ppt/theme/theme2.xml><?xml version="1.0" encoding="utf-8"?>
+<a:theme xmlns:a="http://schemas.openxmlformats.org/drawingml/2006/main" name="Office-téma">
+  <a:themeElements>
+    <a:clrScheme name="Office">
+      <a:dk1>
+        <a:sysClr val="windowText" lastClr="000000"/>
+      </a:dk1>
+      <a:lt1>
+        <a:sysClr val="window" lastClr="FFFFFF"/>
+      </a:lt1>
+      <a:dk2>
+        <a:srgbClr val="44546A"/>
+      </a:dk2>
+      <a:lt2>
+        <a:srgbClr val="E7E6E6"/>
+      </a:lt2>
+      <a:accent1>
+        <a:srgbClr val="4472C4"/>
+      </a:accent1>
+      <a:accent2>
+        <a:srgbClr val="ED7D31"/>
+      </a:accent2>
+      <a:accent3>
+        <a:srgbClr val="A5A5A5"/>
+      </a:accent3>
+      <a:accent4>
+        <a:srgbClr val="FFC000"/>
+      </a:accent4>
+      <a:accent5>
+        <a:srgbClr val="5B9BD5"/>
+      </a:accent5>
+      <a:accent6>
+        <a:srgbClr val="70AD47"/>
+      </a:accent6>
+      <a:hlink>
+        <a:srgbClr val="0563C1"/>
+      </a:hlink>
+      <a:folHlink>
+        <a:srgbClr val="954F72"/>
+      </a:folHlink>
+    </a:clrScheme>
+    <a:fontScheme name="Office">
+      <a:majorFont>
+        <a:latin typeface="Calibri Light" panose="020F0302020204030204"/>
+        <a:ea typeface=""/>
+        <a:cs typeface=""/>
+        <a:font script="Jpan" typeface="游ゴシック Light"/>
+        <a:font script="Hang" typeface="맑은 고딕"/>
+        <a:font script="Hans" typeface="等线 Light"/>
+        <a:font script="Hant" typeface="新細明體"/>
+        <a:font script="Arab" typeface="Times New Roman"/>
+        <a:font script="Hebr" typeface="Times New Roman"/>
+        <a:font script="Thai" typeface="Angsana New"/>
+        <a:font script="Ethi" typeface="Nyala"/>
+        <a:font script="Beng" typeface="Vrinda"/>
+        <a:font script="Gujr" typeface="Shruti"/>
+        <a:font script="Khmr" typeface="MoolBoran"/>
+        <a:font script="Knda" typeface="Tunga"/>
+        <a:font script="Guru" typeface="Raavi"/>
+        <a:font script="Cans" typeface="Euphemia"/>
+        <a:font script="Cher" typeface="Plantagenet Cherokee"/>
+        <a:font script="Yiii" typeface="Microsoft Yi Baiti"/>
+        <a:font script="Tibt" typeface="Microsoft Himalaya"/>
+        <a:font script="Thaa" typeface="MV Boli"/>
+        <a:font script="Deva" typeface="Mangal"/>
+        <a:font script="Telu" typeface="Gautami"/>
+        <a:font script="Taml" typeface="Latha"/>
+        <a:font script="Syrc" typeface="Estrangelo Edessa"/>
+        <a:font script="Orya" typeface="Kalinga"/>
+        <a:font script="Mlym" typeface="Kartika"/>
+        <a:font script="Laoo" typeface="DokChampa"/>
+        <a:font script="Sinh" typeface="Iskoola Pota"/>
+        <a:font script="Mong" typeface="Mongolian Baiti"/>
+        <a:font script="Viet" typeface="Times New Roman"/>
+        <a:font script="Uigh" typeface="Microsoft Uighur"/>
+        <a:font script="Geor" typeface="Sylfaen"/>
+        <a:font script="Armn" typeface="Arial"/>
+        <a:font script="Bugi" typeface="Leelawadee UI"/>
+        <a:font script="Bopo" typeface="Microsoft JhengHei"/>
+        <a:font script="Java" typeface="Javanese Text"/>
+        <a:font script="Lisu" typeface="Segoe UI"/>
+        <a:font script="Mymr" typeface="Myanmar Text"/>
+        <a:font script="Nkoo" typeface="Ebrima"/>
+        <a:font script="Olck" typeface="Nirmala UI"/>
+        <a:font script="Osma" typeface="Ebrima"/>
+        <a:font script="Phag" typeface="Phagspa"/>
+        <a:font script="Syrn" typeface="Estrangelo Edessa"/>
+        <a:font script="Syrj" typeface="Estrangelo Edessa"/>
+        <a:font script="Syre" typeface="Estrangelo Edessa"/>
+        <a:font script="Sora" typeface="Nirmala UI"/>
+        <a:font script="Tale" typeface="Microsoft Tai Le"/>
+        <a:font script="Talu" typeface="Microsoft New Tai Lue"/>
+        <a:font script="Tfng" typeface="Ebrima"/>
+      </a:majorFont>
+      <a:minorFont>
+        <a:latin typeface="Calibri" panose="020F0502020204030204"/>
+        <a:ea typeface=""/>
+        <a:cs typeface=""/>
+        <a:font script="Jpan" typeface="游ゴシック"/>
+        <a:font script="Hang" typeface="맑은 고딕"/>
+        <a:font script="Hans" typeface="等线"/>
+        <a:font script="Hant" typeface="新細明體"/>
+        <a:font script="Arab" typeface="Arial"/>
+        <a:font script="Hebr" typeface="Arial"/>
+        <a:font script="Thai" typeface="Cordia New"/>
+        <a:font script="Ethi" typeface="Nyala"/>
+        <a:font script="Beng" typeface="Vrinda"/>
+        <a:font script="Gujr" typeface="Shruti"/>
+        <a:font script="Khmr" typeface="DaunPenh"/>
+        <a:font script="Knda" typeface="Tunga"/>
+        <a:font script="Guru" typeface="Raavi"/>
+        <a:font script="Cans" typeface="Euphemia"/>
+        <a:font script="Cher" typeface="Plantagenet Cherokee"/>
+        <a:font script="Yiii" typeface="Microsoft Yi Baiti"/>
+        <a:font script="Tibt" typeface="Microsoft Himalaya"/>
+        <a:font script="Thaa" typeface="MV Boli"/>
+        <a:font script="Deva" typeface="Mangal"/>
+        <a:font script="Telu" typeface="Gautami"/>
+        <a:font script="Taml" typeface="Latha"/>
+        <a:font script="Syrc" typeface="Estrangelo Edessa"/>
+        <a:font script="Orya" typeface="Kalinga"/>
+        <a:font script="Mlym" typeface="Kartika"/>
+        <a:font script="Laoo" typeface="DokChampa"/>
+        <a:font script="Sinh" typeface="Iskoola Pota"/>
+        <a:font script="Mong" typeface="Mongolian Baiti"/>
+        <a:font script="Viet" typeface="Arial"/>
+        <a:font script="Uigh" typeface="Microsoft Uighur"/>
+        <a:font script="Geor" typeface="Sylfaen"/>
+        <a:font script="Armn" typeface="Arial"/>
+        <a:font script="Bugi" typeface="Leelawadee UI"/>
+        <a:font script="Bopo" typeface="Microsoft JhengHei"/>
+        <a:font script="Java" typeface="Javanese Text"/>
+        <a:font script="Lisu" typeface="Segoe UI"/>
+        <a:font script="Mymr" typeface="Myanmar Text"/>
+        <a:font script="Nkoo" typeface="Ebrima"/>
+        <a:font script="Olck" typeface="Nirmala UI"/>
+        <a:font script="Osma" typeface="Ebrima"/>
+        <a:font script="Phag" typeface="Phagspa"/>
+        <a:font script="Syrn" typeface="Estrangelo Edessa"/>
+        <a:font script="Syrj" typeface="Estrangelo Edessa"/>
+        <a:font script="Syre" typeface="Estrangelo Edessa"/>
+        <a:font script="Sora" typeface="Nirmala UI"/>
+        <a:font script="Tale" typeface="Microsoft Tai Le"/>
+        <a:font script="Talu" typeface="Microsoft New Tai Lue"/>
+        <a:font script="Tfng" typeface="Ebrima"/>
+      </a:minorFont>
+    </a:fontScheme>
+    <a:fmtScheme name="Office">
+      <a:fillStyleLst>
+        <a:solidFill>
+          <a:schemeClr val="phClr"/>
+        </a:solidFill>
+        <a:gradFill rotWithShape="1">
+          <a:gsLst>
+            <a:gs pos="0">
+              <a:schemeClr val="phClr">
+                <a:lumMod val="110000"/>
+                <a:satMod val="105000"/>
+                <a:tint val="67000"/>
+              </a:schemeClr>
+            </a:gs>
+            <a:gs pos="50000">
+              <a:schemeClr val="phClr">
+                <a:lumMod val="105000"/>
+                <a:satMod val="103000"/>
+                <a:tint val="73000"/>
+              </a:schemeClr>
+            </a:gs>
+            <a:gs pos="100000">
+              <a:schemeClr val="phClr">
+                <a:lumMod val="105000"/>
+                <a:satMod val="109000"/>
+                <a:tint val="81000"/>
+              </a:schemeClr>
+            </a:gs>
+          </a:gsLst>
+          <a:lin ang="5400000" scaled="0"/>
+        </a:gradFill>
+        <a:gradFill rotWithShape="1">
+          <a:gsLst>
+            <a:gs pos="0">
+              <a:schemeClr val="phClr">
+                <a:satMod val="103000"/>
+                <a:lumMod val="102000"/>
+                <a:tint val="94000"/>
+              </a:schemeClr>
+            </a:gs>
+            <a:gs pos="50000">
+              <a:schemeClr val="phClr">
+                <a:satMod val="110000"/>
+                <a:lumMod val="100000"/>
+                <a:shade val="100000"/>
+              </a:schemeClr>
+            </a:gs>
+            <a:gs pos="100000">
+              <a:schemeClr val="phClr">
+                <a:lumMod val="99000"/>
+                <a:satMod val="120000"/>
+                <a:shade val="78000"/>
+              </a:schemeClr>
+            </a:gs>
+          </a:gsLst>
+          <a:lin ang="5400000" scaled="0"/>
+        </a:gradFill>
+      </a:fillStyleLst>
+      <a:lnStyleLst>
+        <a:ln w="6350" cap="flat" cmpd="sng" algn="ctr">
+          <a:solidFill>
+            <a:schemeClr val="phClr"/>
+          </a:solidFill>
+          <a:prstDash val="solid"/>
+          <a:miter lim="800000"/>
+        </a:ln>
+        <a:ln w="12700" cap="flat" cmpd="sng" algn="ctr">
+          <a:solidFill>
+            <a:schemeClr val="phClr"/>
+          </a:solidFill>
+          <a:prstDash val="solid"/>
+          <a:miter lim="800000"/>
+        </a:ln>
+        <a:ln w="19050" cap="flat" cmpd="sng" algn="ctr">
+          <a:solidFill>
+            <a:schemeClr val="phClr"/>
+          </a:solidFill>
+          <a:prstDash val="solid"/>
+          <a:miter lim="800000"/>
+        </a:ln>
+      </a:lnStyleLst>
+      <a:effectStyleLst>
+        <a:effectStyle>
+          <a:effectLst/>
+        </a:effectStyle>
+        <a:effectStyle>
+          <a:effectLst/>
+        </a:effectStyle>
+        <a:effectStyle>
+          <a:effectLst>
+            <a:outerShdw blurRad="57150" dist="19050" dir="5400000" algn="ctr" rotWithShape="0">
+              <a:srgbClr val="000000">
+                <a:alpha val="63000"/>
+              </a:srgbClr>
+            </a:outerShdw>
+          </a:effectLst>
+        </a:effectStyle>
+      </a:effectStyleLst>
+      <a:bgFillStyleLst>
+        <a:solidFill>
+          <a:schemeClr val="phClr"/>
+        </a:solidFill>
+        <a:solidFill>
+          <a:schemeClr val="phClr">
+            <a:tint val="95000"/>
+            <a:satMod val="170000"/>
+          </a:schemeClr>
+        </a:solidFill>
+        <a:gradFill rotWithShape="1">
+          <a:gsLst>
+            <a:gs pos="0">
+              <a:schemeClr val="phClr">
+                <a:tint val="93000"/>
+                <a:satMod val="150000"/>
+                <a:shade val="98000"/>
+                <a:lumMod val="102000"/>
+              </a:schemeClr>
+            </a:gs>
+            <a:gs pos="50000">
+              <a:schemeClr val="phClr">
+                <a:tint val="98000"/>
+                <a:satMod val="130000"/>
+                <a:shade val="90000"/>
+                <a:lumMod val="103000"/>
+              </a:schemeClr>
+            </a:gs>
+            <a:gs pos="100000">
+              <a:schemeClr val="phClr">
+                <a:shade val="63000"/>
+                <a:satMod val="120000"/>
+              </a:schemeClr>
+            </a:gs>
+          </a:gsLst>
+          <a:lin ang="5400000" scaled="0"/>
+        </a:gradFill>
+      </a:bgFillStyleLst>
+    </a:fmtScheme>
+  </a:themeElements>
+  <a:objectDefaults/>
+  <a:extraClrSchemeLst/>
+  <a:extLst>
+    <a:ext uri="{05A4C25C-085E-4340-85A3-A5531E510DB2}">
+      <thm15:themeFamily xmlns:thm15="http://schemas.microsoft.com/office/thememl/2012/main" name="Office Theme" id="{62F939B6-93AF-4DB8-9C6B-D6C7DFDC589F}" vid="{4A3C46E8-61CC-4603-A589-7422A47A8E4A}"/>
+    </a:ext>
+  </a:extLst>
+</a:theme>
 </file>